--- a/DataFlow Flowchart.pptx
+++ b/DataFlow Flowchart.pptx
@@ -8,6 +8,7 @@
     <p:sldId id="256" r:id="rId2"/>
     <p:sldId id="257" r:id="rId3"/>
     <p:sldId id="258" r:id="rId4"/>
+    <p:sldId id="259" r:id="rId5"/>
   </p:sldIdLst>
   <p:sldSz cx="12192000" cy="6858000"/>
   <p:notesSz cx="6858000" cy="9144000"/>
@@ -106,7 +107,297 @@
       </a:defRPr>
     </a:lvl9pPr>
   </p:defaultTextStyle>
+  <p:extLst>
+    <p:ext uri="{EFAFB233-063F-42B5-8137-9DF3F51BA10A}">
+      <p15:sldGuideLst xmlns:p15="http://schemas.microsoft.com/office/powerpoint/2012/main"/>
+    </p:ext>
+  </p:extLst>
 </p:presentation>
+</file>
+
+<file path=ppt/revisionInfo.xml><?xml version="1.0" encoding="utf-8"?>
+<p1510:revInfo xmlns:a="http://schemas.openxmlformats.org/drawingml/2006/main" xmlns:r="http://schemas.openxmlformats.org/officeDocument/2006/relationships" xmlns:p1510="http://schemas.microsoft.com/office/powerpoint/2015/10/main">
+  <p1510:revLst>
+    <p1510:client id="{0B822F9D-AFCC-4F0D-8116-0637F568D23B}" v="10" dt="2026-08-13T19:10:20.974"/>
+  </p1510:revLst>
+</p1510:revInfo>
+</file>
+
+<file path=ppt/changesInfos/changesInfo1.xml><?xml version="1.0" encoding="utf-8"?>
+<pc:chgInfo xmlns:a="http://schemas.openxmlformats.org/drawingml/2006/main" xmlns:r="http://schemas.openxmlformats.org/officeDocument/2006/relationships" xmlns:ac="http://schemas.microsoft.com/office/drawing/2013/main/command" xmlns:pc="http://schemas.microsoft.com/office/powerpoint/2013/main/command">
+  <pc:docChgLst>
+    <pc:chgData name="Dennis Rossman" userId="1eaabeda-a906-45e2-a1c0-c521228cd5ce" providerId="ADAL" clId="{E3357589-5BAD-4DF6-91D6-E2AC62225C93}"/>
+    <pc:docChg chg="undo custSel addSld modSld sldOrd">
+      <pc:chgData name="Dennis Rossman" userId="1eaabeda-a906-45e2-a1c0-c521228cd5ce" providerId="ADAL" clId="{E3357589-5BAD-4DF6-91D6-E2AC62225C93}" dt="2026-08-13T19:13:01.596" v="452" actId="6549"/>
+      <pc:docMkLst>
+        <pc:docMk/>
+      </pc:docMkLst>
+      <pc:sldChg chg="addSp delSp modSp new mod ord">
+        <pc:chgData name="Dennis Rossman" userId="1eaabeda-a906-45e2-a1c0-c521228cd5ce" providerId="ADAL" clId="{E3357589-5BAD-4DF6-91D6-E2AC62225C93}" dt="2026-08-13T19:13:01.596" v="452" actId="6549"/>
+        <pc:sldMkLst>
+          <pc:docMk/>
+          <pc:sldMk cId="1896515347" sldId="259"/>
+        </pc:sldMkLst>
+        <pc:spChg chg="add mod">
+          <ac:chgData name="Dennis Rossman" userId="1eaabeda-a906-45e2-a1c0-c521228cd5ce" providerId="ADAL" clId="{E3357589-5BAD-4DF6-91D6-E2AC62225C93}" dt="2026-08-13T19:01:31.420" v="58" actId="1076"/>
+          <ac:spMkLst>
+            <pc:docMk/>
+            <pc:sldMk cId="1896515347" sldId="259"/>
+            <ac:spMk id="2" creationId="{2F1ABAEB-8CE1-6A28-C452-3A9DED009BF7}"/>
+          </ac:spMkLst>
+        </pc:spChg>
+        <pc:spChg chg="add mod">
+          <ac:chgData name="Dennis Rossman" userId="1eaabeda-a906-45e2-a1c0-c521228cd5ce" providerId="ADAL" clId="{E3357589-5BAD-4DF6-91D6-E2AC62225C93}" dt="2026-08-13T19:09:52.608" v="383" actId="20577"/>
+          <ac:spMkLst>
+            <pc:docMk/>
+            <pc:sldMk cId="1896515347" sldId="259"/>
+            <ac:spMk id="3" creationId="{013F8C6E-D6A5-C521-EA01-6AA72DD092E4}"/>
+          </ac:spMkLst>
+        </pc:spChg>
+        <pc:spChg chg="add mod">
+          <ac:chgData name="Dennis Rossman" userId="1eaabeda-a906-45e2-a1c0-c521228cd5ce" providerId="ADAL" clId="{E3357589-5BAD-4DF6-91D6-E2AC62225C93}" dt="2026-08-13T19:02:33.284" v="68" actId="1076"/>
+          <ac:spMkLst>
+            <pc:docMk/>
+            <pc:sldMk cId="1896515347" sldId="259"/>
+            <ac:spMk id="12" creationId="{B47831B2-19D2-3A69-73A2-73746C95D740}"/>
+          </ac:spMkLst>
+        </pc:spChg>
+        <pc:spChg chg="add mod">
+          <ac:chgData name="Dennis Rossman" userId="1eaabeda-a906-45e2-a1c0-c521228cd5ce" providerId="ADAL" clId="{E3357589-5BAD-4DF6-91D6-E2AC62225C93}" dt="2026-08-13T19:08:42.653" v="255" actId="20577"/>
+          <ac:spMkLst>
+            <pc:docMk/>
+            <pc:sldMk cId="1896515347" sldId="259"/>
+            <ac:spMk id="16" creationId="{772812FC-6F57-EDE9-7E65-F83A514C43F1}"/>
+          </ac:spMkLst>
+        </pc:spChg>
+        <pc:spChg chg="add mod">
+          <ac:chgData name="Dennis Rossman" userId="1eaabeda-a906-45e2-a1c0-c521228cd5ce" providerId="ADAL" clId="{E3357589-5BAD-4DF6-91D6-E2AC62225C93}" dt="2026-08-13T19:07:18.205" v="184" actId="14100"/>
+          <ac:spMkLst>
+            <pc:docMk/>
+            <pc:sldMk cId="1896515347" sldId="259"/>
+            <ac:spMk id="18" creationId="{FB392C59-134F-8F41-E231-F6C92B4FBFAA}"/>
+          </ac:spMkLst>
+        </pc:spChg>
+        <pc:spChg chg="add del">
+          <ac:chgData name="Dennis Rossman" userId="1eaabeda-a906-45e2-a1c0-c521228cd5ce" providerId="ADAL" clId="{E3357589-5BAD-4DF6-91D6-E2AC62225C93}" dt="2026-08-13T19:04:24.308" v="158" actId="22"/>
+          <ac:spMkLst>
+            <pc:docMk/>
+            <pc:sldMk cId="1896515347" sldId="259"/>
+            <ac:spMk id="20" creationId="{88DDFAEC-F122-B60F-9B5A-ACE5F41BF78B}"/>
+          </ac:spMkLst>
+        </pc:spChg>
+        <pc:spChg chg="add mod">
+          <ac:chgData name="Dennis Rossman" userId="1eaabeda-a906-45e2-a1c0-c521228cd5ce" providerId="ADAL" clId="{E3357589-5BAD-4DF6-91D6-E2AC62225C93}" dt="2026-08-13T19:05:42.718" v="167" actId="1076"/>
+          <ac:spMkLst>
+            <pc:docMk/>
+            <pc:sldMk cId="1896515347" sldId="259"/>
+            <ac:spMk id="27" creationId="{74CE3786-9669-9D73-01FA-F2A010F9427E}"/>
+          </ac:spMkLst>
+        </pc:spChg>
+        <pc:spChg chg="add mod">
+          <ac:chgData name="Dennis Rossman" userId="1eaabeda-a906-45e2-a1c0-c521228cd5ce" providerId="ADAL" clId="{E3357589-5BAD-4DF6-91D6-E2AC62225C93}" dt="2026-08-13T19:06:06.588" v="172" actId="1076"/>
+          <ac:spMkLst>
+            <pc:docMk/>
+            <pc:sldMk cId="1896515347" sldId="259"/>
+            <ac:spMk id="32" creationId="{2CC1F77B-49DE-71E0-8ED7-FAF5BD99EF38}"/>
+          </ac:spMkLst>
+        </pc:spChg>
+        <pc:spChg chg="add mod">
+          <ac:chgData name="Dennis Rossman" userId="1eaabeda-a906-45e2-a1c0-c521228cd5ce" providerId="ADAL" clId="{E3357589-5BAD-4DF6-91D6-E2AC62225C93}" dt="2026-08-13T19:08:27.321" v="235" actId="20577"/>
+          <ac:spMkLst>
+            <pc:docMk/>
+            <pc:sldMk cId="1896515347" sldId="259"/>
+            <ac:spMk id="48" creationId="{8D951054-4167-30DA-3CA7-E2DAD5B53A69}"/>
+          </ac:spMkLst>
+        </pc:spChg>
+        <pc:spChg chg="add mod">
+          <ac:chgData name="Dennis Rossman" userId="1eaabeda-a906-45e2-a1c0-c521228cd5ce" providerId="ADAL" clId="{E3357589-5BAD-4DF6-91D6-E2AC62225C93}" dt="2026-08-13T19:10:53.949" v="414" actId="1038"/>
+          <ac:spMkLst>
+            <pc:docMk/>
+            <pc:sldMk cId="1896515347" sldId="259"/>
+            <ac:spMk id="53" creationId="{E43183A0-493A-04D5-4591-20A0F3CC7E20}"/>
+          </ac:spMkLst>
+        </pc:spChg>
+        <pc:spChg chg="add mod">
+          <ac:chgData name="Dennis Rossman" userId="1eaabeda-a906-45e2-a1c0-c521228cd5ce" providerId="ADAL" clId="{E3357589-5BAD-4DF6-91D6-E2AC62225C93}" dt="2026-08-13T19:10:53.949" v="414" actId="1038"/>
+          <ac:spMkLst>
+            <pc:docMk/>
+            <pc:sldMk cId="1896515347" sldId="259"/>
+            <ac:spMk id="55" creationId="{4DA6C0F1-BB52-1676-2827-4BD76B97095A}"/>
+          </ac:spMkLst>
+        </pc:spChg>
+        <pc:spChg chg="add mod">
+          <ac:chgData name="Dennis Rossman" userId="1eaabeda-a906-45e2-a1c0-c521228cd5ce" providerId="ADAL" clId="{E3357589-5BAD-4DF6-91D6-E2AC62225C93}" dt="2026-08-13T19:10:53.949" v="414" actId="1038"/>
+          <ac:spMkLst>
+            <pc:docMk/>
+            <pc:sldMk cId="1896515347" sldId="259"/>
+            <ac:spMk id="57" creationId="{6E424411-DCDC-EF3D-5EDF-CF19EED5F260}"/>
+          </ac:spMkLst>
+        </pc:spChg>
+        <pc:spChg chg="add mod">
+          <ac:chgData name="Dennis Rossman" userId="1eaabeda-a906-45e2-a1c0-c521228cd5ce" providerId="ADAL" clId="{E3357589-5BAD-4DF6-91D6-E2AC62225C93}" dt="2026-08-13T19:10:53.949" v="414" actId="1038"/>
+          <ac:spMkLst>
+            <pc:docMk/>
+            <pc:sldMk cId="1896515347" sldId="259"/>
+            <ac:spMk id="59" creationId="{EDC062B2-2B97-16D4-A2F4-1269F7E1D7DF}"/>
+          </ac:spMkLst>
+        </pc:spChg>
+        <pc:spChg chg="add mod">
+          <ac:chgData name="Dennis Rossman" userId="1eaabeda-a906-45e2-a1c0-c521228cd5ce" providerId="ADAL" clId="{E3357589-5BAD-4DF6-91D6-E2AC62225C93}" dt="2026-08-13T19:13:01.596" v="452" actId="6549"/>
+          <ac:spMkLst>
+            <pc:docMk/>
+            <pc:sldMk cId="1896515347" sldId="259"/>
+            <ac:spMk id="77" creationId="{D238BFC7-C87A-59D4-A7F7-61100FFE6EDB}"/>
+          </ac:spMkLst>
+        </pc:spChg>
+        <pc:picChg chg="add del mod">
+          <ac:chgData name="Dennis Rossman" userId="1eaabeda-a906-45e2-a1c0-c521228cd5ce" providerId="ADAL" clId="{E3357589-5BAD-4DF6-91D6-E2AC62225C93}" dt="2026-08-13T19:02:43.245" v="71" actId="931"/>
+          <ac:picMkLst>
+            <pc:docMk/>
+            <pc:sldMk cId="1896515347" sldId="259"/>
+            <ac:picMk id="14" creationId="{E93FA3BF-28DE-4393-8F4B-882EEAB48C2B}"/>
+          </ac:picMkLst>
+        </pc:picChg>
+        <pc:cxnChg chg="add mod">
+          <ac:chgData name="Dennis Rossman" userId="1eaabeda-a906-45e2-a1c0-c521228cd5ce" providerId="ADAL" clId="{E3357589-5BAD-4DF6-91D6-E2AC62225C93}" dt="2026-08-13T19:01:31.420" v="58" actId="1076"/>
+          <ac:cxnSpMkLst>
+            <pc:docMk/>
+            <pc:sldMk cId="1896515347" sldId="259"/>
+            <ac:cxnSpMk id="5" creationId="{89553F50-197B-0C27-114A-D86BF466BEF8}"/>
+          </ac:cxnSpMkLst>
+        </pc:cxnChg>
+        <pc:cxnChg chg="add mod">
+          <ac:chgData name="Dennis Rossman" userId="1eaabeda-a906-45e2-a1c0-c521228cd5ce" providerId="ADAL" clId="{E3357589-5BAD-4DF6-91D6-E2AC62225C93}" dt="2026-08-13T19:02:18.772" v="64" actId="14100"/>
+          <ac:cxnSpMkLst>
+            <pc:docMk/>
+            <pc:sldMk cId="1896515347" sldId="259"/>
+            <ac:cxnSpMk id="8" creationId="{88E9DB4A-570E-9287-5277-D7EF17BAEE18}"/>
+          </ac:cxnSpMkLst>
+        </pc:cxnChg>
+        <pc:cxnChg chg="add">
+          <ac:chgData name="Dennis Rossman" userId="1eaabeda-a906-45e2-a1c0-c521228cd5ce" providerId="ADAL" clId="{E3357589-5BAD-4DF6-91D6-E2AC62225C93}" dt="2026-08-13T19:02:11.014" v="63" actId="11529"/>
+          <ac:cxnSpMkLst>
+            <pc:docMk/>
+            <pc:sldMk cId="1896515347" sldId="259"/>
+            <ac:cxnSpMk id="10" creationId="{7A26A7EA-BAA5-7154-B317-361146E817A4}"/>
+          </ac:cxnSpMkLst>
+        </pc:cxnChg>
+        <pc:cxnChg chg="add mod">
+          <ac:chgData name="Dennis Rossman" userId="1eaabeda-a906-45e2-a1c0-c521228cd5ce" providerId="ADAL" clId="{E3357589-5BAD-4DF6-91D6-E2AC62225C93}" dt="2026-08-13T19:07:18.205" v="184" actId="14100"/>
+          <ac:cxnSpMkLst>
+            <pc:docMk/>
+            <pc:sldMk cId="1896515347" sldId="259"/>
+            <ac:cxnSpMk id="21" creationId="{9A6B345B-B900-EE0E-ABEA-E67C5CA599CE}"/>
+          </ac:cxnSpMkLst>
+        </pc:cxnChg>
+        <pc:cxnChg chg="add mod">
+          <ac:chgData name="Dennis Rossman" userId="1eaabeda-a906-45e2-a1c0-c521228cd5ce" providerId="ADAL" clId="{E3357589-5BAD-4DF6-91D6-E2AC62225C93}" dt="2026-08-13T19:08:34.428" v="236" actId="14100"/>
+          <ac:cxnSpMkLst>
+            <pc:docMk/>
+            <pc:sldMk cId="1896515347" sldId="259"/>
+            <ac:cxnSpMk id="23" creationId="{1F1794E8-9985-D68F-0CE5-EA70E008D92F}"/>
+          </ac:cxnSpMkLst>
+        </pc:cxnChg>
+        <pc:cxnChg chg="add mod">
+          <ac:chgData name="Dennis Rossman" userId="1eaabeda-a906-45e2-a1c0-c521228cd5ce" providerId="ADAL" clId="{E3357589-5BAD-4DF6-91D6-E2AC62225C93}" dt="2026-08-13T19:05:55.661" v="170" actId="14100"/>
+          <ac:cxnSpMkLst>
+            <pc:docMk/>
+            <pc:sldMk cId="1896515347" sldId="259"/>
+            <ac:cxnSpMk id="28" creationId="{C27B7AF1-4CE2-7E9C-F6C2-FA07B05F6762}"/>
+          </ac:cxnSpMkLst>
+        </pc:cxnChg>
+        <pc:cxnChg chg="add mod">
+          <ac:chgData name="Dennis Rossman" userId="1eaabeda-a906-45e2-a1c0-c521228cd5ce" providerId="ADAL" clId="{E3357589-5BAD-4DF6-91D6-E2AC62225C93}" dt="2026-08-13T19:08:34.428" v="236" actId="14100"/>
+          <ac:cxnSpMkLst>
+            <pc:docMk/>
+            <pc:sldMk cId="1896515347" sldId="259"/>
+            <ac:cxnSpMk id="33" creationId="{B48E02EC-DB90-FB78-0708-5C11BC2F0791}"/>
+          </ac:cxnSpMkLst>
+        </pc:cxnChg>
+        <pc:cxnChg chg="add mod">
+          <ac:chgData name="Dennis Rossman" userId="1eaabeda-a906-45e2-a1c0-c521228cd5ce" providerId="ADAL" clId="{E3357589-5BAD-4DF6-91D6-E2AC62225C93}" dt="2026-08-13T19:06:54.347" v="179" actId="14100"/>
+          <ac:cxnSpMkLst>
+            <pc:docMk/>
+            <pc:sldMk cId="1896515347" sldId="259"/>
+            <ac:cxnSpMk id="37" creationId="{93763FE7-B93D-B236-7093-D16130E85C8B}"/>
+          </ac:cxnSpMkLst>
+        </pc:cxnChg>
+        <pc:cxnChg chg="add mod">
+          <ac:chgData name="Dennis Rossman" userId="1eaabeda-a906-45e2-a1c0-c521228cd5ce" providerId="ADAL" clId="{E3357589-5BAD-4DF6-91D6-E2AC62225C93}" dt="2026-08-13T19:07:18.205" v="184" actId="14100"/>
+          <ac:cxnSpMkLst>
+            <pc:docMk/>
+            <pc:sldMk cId="1896515347" sldId="259"/>
+            <ac:cxnSpMk id="41" creationId="{1C5DC5E5-327C-A673-7FE3-BDC79C171403}"/>
+          </ac:cxnSpMkLst>
+        </pc:cxnChg>
+        <pc:cxnChg chg="add mod">
+          <ac:chgData name="Dennis Rossman" userId="1eaabeda-a906-45e2-a1c0-c521228cd5ce" providerId="ADAL" clId="{E3357589-5BAD-4DF6-91D6-E2AC62225C93}" dt="2026-08-13T19:07:36.569" v="185"/>
+          <ac:cxnSpMkLst>
+            <pc:docMk/>
+            <pc:sldMk cId="1896515347" sldId="259"/>
+            <ac:cxnSpMk id="46" creationId="{AFAF3F9E-5DED-469C-D5C6-DED3ADA61997}"/>
+          </ac:cxnSpMkLst>
+        </pc:cxnChg>
+        <pc:cxnChg chg="add">
+          <ac:chgData name="Dennis Rossman" userId="1eaabeda-a906-45e2-a1c0-c521228cd5ce" providerId="ADAL" clId="{E3357589-5BAD-4DF6-91D6-E2AC62225C93}" dt="2026-08-13T19:08:51.119" v="256" actId="11529"/>
+          <ac:cxnSpMkLst>
+            <pc:docMk/>
+            <pc:sldMk cId="1896515347" sldId="259"/>
+            <ac:cxnSpMk id="52" creationId="{BCAA390B-07F0-D027-6377-D0DC19889F4A}"/>
+          </ac:cxnSpMkLst>
+        </pc:cxnChg>
+        <pc:cxnChg chg="add mod">
+          <ac:chgData name="Dennis Rossman" userId="1eaabeda-a906-45e2-a1c0-c521228cd5ce" providerId="ADAL" clId="{E3357589-5BAD-4DF6-91D6-E2AC62225C93}" dt="2026-08-13T19:10:53.949" v="414" actId="1038"/>
+          <ac:cxnSpMkLst>
+            <pc:docMk/>
+            <pc:sldMk cId="1896515347" sldId="259"/>
+            <ac:cxnSpMk id="54" creationId="{B7B7F931-38C4-6355-CDE4-73A9D9E36BBB}"/>
+          </ac:cxnSpMkLst>
+        </pc:cxnChg>
+        <pc:cxnChg chg="add mod">
+          <ac:chgData name="Dennis Rossman" userId="1eaabeda-a906-45e2-a1c0-c521228cd5ce" providerId="ADAL" clId="{E3357589-5BAD-4DF6-91D6-E2AC62225C93}" dt="2026-08-13T19:10:53.949" v="414" actId="1038"/>
+          <ac:cxnSpMkLst>
+            <pc:docMk/>
+            <pc:sldMk cId="1896515347" sldId="259"/>
+            <ac:cxnSpMk id="56" creationId="{933FB6DB-6199-946E-BC17-E69C9A1B1FBE}"/>
+          </ac:cxnSpMkLst>
+        </pc:cxnChg>
+        <pc:cxnChg chg="add mod">
+          <ac:chgData name="Dennis Rossman" userId="1eaabeda-a906-45e2-a1c0-c521228cd5ce" providerId="ADAL" clId="{E3357589-5BAD-4DF6-91D6-E2AC62225C93}" dt="2026-08-13T19:10:53.949" v="414" actId="1038"/>
+          <ac:cxnSpMkLst>
+            <pc:docMk/>
+            <pc:sldMk cId="1896515347" sldId="259"/>
+            <ac:cxnSpMk id="58" creationId="{D393163E-D43C-06E5-9DFC-905A564BC47B}"/>
+          </ac:cxnSpMkLst>
+        </pc:cxnChg>
+        <pc:cxnChg chg="add mod">
+          <ac:chgData name="Dennis Rossman" userId="1eaabeda-a906-45e2-a1c0-c521228cd5ce" providerId="ADAL" clId="{E3357589-5BAD-4DF6-91D6-E2AC62225C93}" dt="2026-08-13T19:10:53.949" v="414" actId="1038"/>
+          <ac:cxnSpMkLst>
+            <pc:docMk/>
+            <pc:sldMk cId="1896515347" sldId="259"/>
+            <ac:cxnSpMk id="60" creationId="{3EB4EDBC-367F-3938-A401-27DFBD1CA4AB}"/>
+          </ac:cxnSpMkLst>
+        </pc:cxnChg>
+        <pc:cxnChg chg="add mod">
+          <ac:chgData name="Dennis Rossman" userId="1eaabeda-a906-45e2-a1c0-c521228cd5ce" providerId="ADAL" clId="{E3357589-5BAD-4DF6-91D6-E2AC62225C93}" dt="2026-08-13T19:11:47.076" v="423" actId="14100"/>
+          <ac:cxnSpMkLst>
+            <pc:docMk/>
+            <pc:sldMk cId="1896515347" sldId="259"/>
+            <ac:cxnSpMk id="61" creationId="{ECD57E87-A883-88A9-C010-5248B515C36B}"/>
+          </ac:cxnSpMkLst>
+        </pc:cxnChg>
+        <pc:cxnChg chg="add mod">
+          <ac:chgData name="Dennis Rossman" userId="1eaabeda-a906-45e2-a1c0-c521228cd5ce" providerId="ADAL" clId="{E3357589-5BAD-4DF6-91D6-E2AC62225C93}" dt="2026-08-13T19:12:01.852" v="426" actId="14100"/>
+          <ac:cxnSpMkLst>
+            <pc:docMk/>
+            <pc:sldMk cId="1896515347" sldId="259"/>
+            <ac:cxnSpMk id="62" creationId="{4FB521C8-1645-22D2-0805-714F8C70F80B}"/>
+          </ac:cxnSpMkLst>
+        </pc:cxnChg>
+      </pc:sldChg>
+    </pc:docChg>
+  </pc:docChgLst>
+</pc:chgInfo>
 </file>
 
 <file path=ppt/slideLayouts/slideLayout1.xml><?xml version="1.0" encoding="utf-8"?>
@@ -6152,6 +6443,1370 @@
     <p:extLst>
       <p:ext uri="{BB962C8B-B14F-4D97-AF65-F5344CB8AC3E}">
         <p14:creationId xmlns:p14="http://schemas.microsoft.com/office/powerpoint/2010/main" val="2338143802"/>
+      </p:ext>
+    </p:extLst>
+  </p:cSld>
+  <p:clrMapOvr>
+    <a:masterClrMapping/>
+  </p:clrMapOvr>
+</p:sld>
+</file>
+
+<file path=ppt/slides/slide4.xml><?xml version="1.0" encoding="utf-8"?>
+<p:sld xmlns:a="http://schemas.openxmlformats.org/drawingml/2006/main" xmlns:r="http://schemas.openxmlformats.org/officeDocument/2006/relationships" xmlns:p="http://schemas.openxmlformats.org/presentationml/2006/main">
+  <p:cSld>
+    <p:spTree>
+      <p:nvGrpSpPr>
+        <p:cNvPr id="1" name=""/>
+        <p:cNvGrpSpPr/>
+        <p:nvPr/>
+      </p:nvGrpSpPr>
+      <p:grpSpPr>
+        <a:xfrm>
+          <a:off x="0" y="0"/>
+          <a:ext cx="0" cy="0"/>
+          <a:chOff x="0" y="0"/>
+          <a:chExt cx="0" cy="0"/>
+        </a:xfrm>
+      </p:grpSpPr>
+      <p:sp>
+        <p:nvSpPr>
+          <p:cNvPr id="2" name="Rectangle 1">
+            <a:extLst>
+              <a:ext uri="{FF2B5EF4-FFF2-40B4-BE49-F238E27FC236}">
+                <a16:creationId xmlns:a16="http://schemas.microsoft.com/office/drawing/2014/main" id="{2F1ABAEB-8CE1-6A28-C452-3A9DED009BF7}"/>
+              </a:ext>
+            </a:extLst>
+          </p:cNvPr>
+          <p:cNvSpPr/>
+          <p:nvPr/>
+        </p:nvSpPr>
+        <p:spPr>
+          <a:xfrm>
+            <a:off x="1824180" y="711201"/>
+            <a:ext cx="1293091" cy="877455"/>
+          </a:xfrm>
+          <a:prstGeom prst="rect">
+            <a:avLst/>
+          </a:prstGeom>
+        </p:spPr>
+        <p:style>
+          <a:lnRef idx="2">
+            <a:schemeClr val="accent1">
+              <a:shade val="15000"/>
+            </a:schemeClr>
+          </a:lnRef>
+          <a:fillRef idx="1">
+            <a:schemeClr val="accent1"/>
+          </a:fillRef>
+          <a:effectRef idx="0">
+            <a:schemeClr val="accent1"/>
+          </a:effectRef>
+          <a:fontRef idx="minor">
+            <a:schemeClr val="lt1"/>
+          </a:fontRef>
+        </p:style>
+        <p:txBody>
+          <a:bodyPr rtlCol="0" anchor="ctr"/>
+          <a:lstStyle/>
+          <a:p>
+            <a:pPr algn="ctr"/>
+            <a:r>
+              <a:rPr lang="en-US" dirty="0"/>
+              <a:t>Read line from data file</a:t>
+            </a:r>
+          </a:p>
+        </p:txBody>
+      </p:sp>
+      <p:sp>
+        <p:nvSpPr>
+          <p:cNvPr id="3" name="Flowchart: Decision 2">
+            <a:extLst>
+              <a:ext uri="{FF2B5EF4-FFF2-40B4-BE49-F238E27FC236}">
+                <a16:creationId xmlns:a16="http://schemas.microsoft.com/office/drawing/2014/main" id="{013F8C6E-D6A5-C521-EA01-6AA72DD092E4}"/>
+              </a:ext>
+            </a:extLst>
+          </p:cNvPr>
+          <p:cNvSpPr/>
+          <p:nvPr/>
+        </p:nvSpPr>
+        <p:spPr>
+          <a:xfrm>
+            <a:off x="1163781" y="1988128"/>
+            <a:ext cx="2613891" cy="1440872"/>
+          </a:xfrm>
+          <a:prstGeom prst="flowChartDecision">
+            <a:avLst/>
+          </a:prstGeom>
+        </p:spPr>
+        <p:style>
+          <a:lnRef idx="2">
+            <a:schemeClr val="accent1">
+              <a:shade val="15000"/>
+            </a:schemeClr>
+          </a:lnRef>
+          <a:fillRef idx="1">
+            <a:schemeClr val="accent1"/>
+          </a:fillRef>
+          <a:effectRef idx="0">
+            <a:schemeClr val="accent1"/>
+          </a:effectRef>
+          <a:fontRef idx="minor">
+            <a:schemeClr val="lt1"/>
+          </a:fontRef>
+        </p:style>
+        <p:txBody>
+          <a:bodyPr rtlCol="0" anchor="ctr"/>
+          <a:lstStyle/>
+          <a:p>
+            <a:pPr algn="ctr"/>
+            <a:r>
+              <a:rPr lang="en-US" dirty="0"/>
+              <a:t>Pump down start? State = 11</a:t>
+            </a:r>
+          </a:p>
+        </p:txBody>
+      </p:sp>
+      <p:cxnSp>
+        <p:nvCxnSpPr>
+          <p:cNvPr id="5" name="Straight Arrow Connector 4">
+            <a:extLst>
+              <a:ext uri="{FF2B5EF4-FFF2-40B4-BE49-F238E27FC236}">
+                <a16:creationId xmlns:a16="http://schemas.microsoft.com/office/drawing/2014/main" id="{89553F50-197B-0C27-114A-D86BF466BEF8}"/>
+              </a:ext>
+            </a:extLst>
+          </p:cNvPr>
+          <p:cNvCxnSpPr>
+            <a:stCxn id="2" idx="2"/>
+            <a:endCxn id="3" idx="0"/>
+          </p:cNvCxnSpPr>
+          <p:nvPr/>
+        </p:nvCxnSpPr>
+        <p:spPr>
+          <a:xfrm>
+            <a:off x="2470726" y="1588656"/>
+            <a:ext cx="1" cy="399472"/>
+          </a:xfrm>
+          <a:prstGeom prst="straightConnector1">
+            <a:avLst/>
+          </a:prstGeom>
+          <a:ln>
+            <a:tailEnd type="triangle"/>
+          </a:ln>
+        </p:spPr>
+        <p:style>
+          <a:lnRef idx="2">
+            <a:schemeClr val="accent1"/>
+          </a:lnRef>
+          <a:fillRef idx="0">
+            <a:schemeClr val="accent1"/>
+          </a:fillRef>
+          <a:effectRef idx="1">
+            <a:schemeClr val="accent1"/>
+          </a:effectRef>
+          <a:fontRef idx="minor">
+            <a:schemeClr val="tx1"/>
+          </a:fontRef>
+        </p:style>
+      </p:cxnSp>
+      <p:cxnSp>
+        <p:nvCxnSpPr>
+          <p:cNvPr id="8" name="Connector: Elbow 7">
+            <a:extLst>
+              <a:ext uri="{FF2B5EF4-FFF2-40B4-BE49-F238E27FC236}">
+                <a16:creationId xmlns:a16="http://schemas.microsoft.com/office/drawing/2014/main" id="{88E9DB4A-570E-9287-5277-D7EF17BAEE18}"/>
+              </a:ext>
+            </a:extLst>
+          </p:cNvPr>
+          <p:cNvCxnSpPr>
+            <a:cxnSpLocks/>
+            <a:stCxn id="3" idx="1"/>
+          </p:cNvCxnSpPr>
+          <p:nvPr/>
+        </p:nvCxnSpPr>
+        <p:spPr>
+          <a:xfrm rot="10800000">
+            <a:off x="563419" y="1149928"/>
+            <a:ext cx="600363" cy="1558636"/>
+          </a:xfrm>
+          <a:prstGeom prst="bentConnector2">
+            <a:avLst/>
+          </a:prstGeom>
+        </p:spPr>
+        <p:style>
+          <a:lnRef idx="2">
+            <a:schemeClr val="accent1"/>
+          </a:lnRef>
+          <a:fillRef idx="0">
+            <a:schemeClr val="accent1"/>
+          </a:fillRef>
+          <a:effectRef idx="1">
+            <a:schemeClr val="accent1"/>
+          </a:effectRef>
+          <a:fontRef idx="minor">
+            <a:schemeClr val="tx1"/>
+          </a:fontRef>
+        </p:style>
+      </p:cxnSp>
+      <p:cxnSp>
+        <p:nvCxnSpPr>
+          <p:cNvPr id="10" name="Straight Arrow Connector 9">
+            <a:extLst>
+              <a:ext uri="{FF2B5EF4-FFF2-40B4-BE49-F238E27FC236}">
+                <a16:creationId xmlns:a16="http://schemas.microsoft.com/office/drawing/2014/main" id="{7A26A7EA-BAA5-7154-B317-361146E817A4}"/>
+              </a:ext>
+            </a:extLst>
+          </p:cNvPr>
+          <p:cNvCxnSpPr>
+            <a:endCxn id="2" idx="1"/>
+          </p:cNvCxnSpPr>
+          <p:nvPr/>
+        </p:nvCxnSpPr>
+        <p:spPr>
+          <a:xfrm>
+            <a:off x="563418" y="1149928"/>
+            <a:ext cx="1260762" cy="1"/>
+          </a:xfrm>
+          <a:prstGeom prst="straightConnector1">
+            <a:avLst/>
+          </a:prstGeom>
+          <a:ln>
+            <a:tailEnd type="triangle"/>
+          </a:ln>
+        </p:spPr>
+        <p:style>
+          <a:lnRef idx="2">
+            <a:schemeClr val="accent1"/>
+          </a:lnRef>
+          <a:fillRef idx="0">
+            <a:schemeClr val="accent1"/>
+          </a:fillRef>
+          <a:effectRef idx="1">
+            <a:schemeClr val="accent1"/>
+          </a:effectRef>
+          <a:fontRef idx="minor">
+            <a:schemeClr val="tx1"/>
+          </a:fontRef>
+        </p:style>
+      </p:cxnSp>
+      <p:sp>
+        <p:nvSpPr>
+          <p:cNvPr id="12" name="TextBox 11">
+            <a:extLst>
+              <a:ext uri="{FF2B5EF4-FFF2-40B4-BE49-F238E27FC236}">
+                <a16:creationId xmlns:a16="http://schemas.microsoft.com/office/drawing/2014/main" id="{B47831B2-19D2-3A69-73A2-73746C95D740}"/>
+              </a:ext>
+            </a:extLst>
+          </p:cNvPr>
+          <p:cNvSpPr txBox="1"/>
+          <p:nvPr/>
+        </p:nvSpPr>
+        <p:spPr>
+          <a:xfrm>
+            <a:off x="626195" y="2373929"/>
+            <a:ext cx="474810" cy="369332"/>
+          </a:xfrm>
+          <a:prstGeom prst="rect">
+            <a:avLst/>
+          </a:prstGeom>
+          <a:noFill/>
+        </p:spPr>
+        <p:txBody>
+          <a:bodyPr wrap="none" rtlCol="0">
+            <a:spAutoFit/>
+          </a:bodyPr>
+          <a:lstStyle/>
+          <a:p>
+            <a:r>
+              <a:rPr lang="en-US" dirty="0"/>
+              <a:t>No</a:t>
+            </a:r>
+          </a:p>
+        </p:txBody>
+      </p:sp>
+      <p:sp>
+        <p:nvSpPr>
+          <p:cNvPr id="16" name="Rectangle 15">
+            <a:extLst>
+              <a:ext uri="{FF2B5EF4-FFF2-40B4-BE49-F238E27FC236}">
+                <a16:creationId xmlns:a16="http://schemas.microsoft.com/office/drawing/2014/main" id="{772812FC-6F57-EDE9-7E65-F83A514C43F1}"/>
+              </a:ext>
+            </a:extLst>
+          </p:cNvPr>
+          <p:cNvSpPr/>
+          <p:nvPr/>
+        </p:nvSpPr>
+        <p:spPr>
+          <a:xfrm>
+            <a:off x="1360051" y="3756891"/>
+            <a:ext cx="2221347" cy="1794164"/>
+          </a:xfrm>
+          <a:prstGeom prst="rect">
+            <a:avLst/>
+          </a:prstGeom>
+        </p:spPr>
+        <p:style>
+          <a:lnRef idx="2">
+            <a:schemeClr val="accent1">
+              <a:shade val="15000"/>
+            </a:schemeClr>
+          </a:lnRef>
+          <a:fillRef idx="1">
+            <a:schemeClr val="accent1"/>
+          </a:fillRef>
+          <a:effectRef idx="0">
+            <a:schemeClr val="accent1"/>
+          </a:effectRef>
+          <a:fontRef idx="minor">
+            <a:schemeClr val="lt1"/>
+          </a:fontRef>
+        </p:style>
+        <p:txBody>
+          <a:bodyPr rtlCol="0" anchor="ctr"/>
+          <a:lstStyle/>
+          <a:p>
+            <a:pPr marL="285750" indent="-285750" algn="ctr">
+              <a:buFont typeface="Arial" panose="020B0604020202020204" pitchFamily="34" charset="0"/>
+              <a:buChar char="•"/>
+            </a:pPr>
+            <a:r>
+              <a:rPr lang="en-US" dirty="0"/>
+              <a:t>Save pump down start time</a:t>
+            </a:r>
+          </a:p>
+          <a:p>
+            <a:pPr marL="285750" indent="-285750" algn="ctr">
+              <a:buFont typeface="Arial" panose="020B0604020202020204" pitchFamily="34" charset="0"/>
+              <a:buChar char="•"/>
+            </a:pPr>
+            <a:r>
+              <a:rPr lang="en-US" dirty="0"/>
+              <a:t>Create blank IDL file</a:t>
+            </a:r>
+          </a:p>
+          <a:p>
+            <a:pPr marL="285750" indent="-285750" algn="ctr">
+              <a:buFont typeface="Arial" panose="020B0604020202020204" pitchFamily="34" charset="0"/>
+              <a:buChar char="•"/>
+            </a:pPr>
+            <a:r>
+              <a:rPr lang="en-US" dirty="0"/>
+              <a:t>Write out IDL file</a:t>
+            </a:r>
+          </a:p>
+        </p:txBody>
+      </p:sp>
+      <p:sp>
+        <p:nvSpPr>
+          <p:cNvPr id="18" name="Flowchart: Decision 17">
+            <a:extLst>
+              <a:ext uri="{FF2B5EF4-FFF2-40B4-BE49-F238E27FC236}">
+                <a16:creationId xmlns:a16="http://schemas.microsoft.com/office/drawing/2014/main" id="{FB392C59-134F-8F41-E231-F6C92B4FBFAA}"/>
+              </a:ext>
+            </a:extLst>
+          </p:cNvPr>
+          <p:cNvSpPr/>
+          <p:nvPr/>
+        </p:nvSpPr>
+        <p:spPr>
+          <a:xfrm>
+            <a:off x="4886033" y="1988127"/>
+            <a:ext cx="2613891" cy="1555163"/>
+          </a:xfrm>
+          <a:prstGeom prst="flowChartDecision">
+            <a:avLst/>
+          </a:prstGeom>
+        </p:spPr>
+        <p:style>
+          <a:lnRef idx="2">
+            <a:schemeClr val="accent1">
+              <a:shade val="15000"/>
+            </a:schemeClr>
+          </a:lnRef>
+          <a:fillRef idx="1">
+            <a:schemeClr val="accent1"/>
+          </a:fillRef>
+          <a:effectRef idx="0">
+            <a:schemeClr val="accent1"/>
+          </a:effectRef>
+          <a:fontRef idx="minor">
+            <a:schemeClr val="lt1"/>
+          </a:fontRef>
+        </p:style>
+        <p:txBody>
+          <a:bodyPr rtlCol="0" anchor="ctr"/>
+          <a:lstStyle/>
+          <a:p>
+            <a:pPr algn="ctr"/>
+            <a:r>
+              <a:rPr lang="en-US" dirty="0"/>
+              <a:t>Pump down ended? State &lt;&gt;11</a:t>
+            </a:r>
+          </a:p>
+        </p:txBody>
+      </p:sp>
+      <p:cxnSp>
+        <p:nvCxnSpPr>
+          <p:cNvPr id="21" name="Connector: Elbow 20">
+            <a:extLst>
+              <a:ext uri="{FF2B5EF4-FFF2-40B4-BE49-F238E27FC236}">
+                <a16:creationId xmlns:a16="http://schemas.microsoft.com/office/drawing/2014/main" id="{9A6B345B-B900-EE0E-ABEA-E67C5CA599CE}"/>
+              </a:ext>
+            </a:extLst>
+          </p:cNvPr>
+          <p:cNvCxnSpPr>
+            <a:cxnSpLocks/>
+            <a:stCxn id="18" idx="1"/>
+          </p:cNvCxnSpPr>
+          <p:nvPr/>
+        </p:nvCxnSpPr>
+        <p:spPr>
+          <a:xfrm rot="10800000">
+            <a:off x="4285681" y="1149931"/>
+            <a:ext cx="600353" cy="1615779"/>
+          </a:xfrm>
+          <a:prstGeom prst="bentConnector2">
+            <a:avLst/>
+          </a:prstGeom>
+        </p:spPr>
+        <p:style>
+          <a:lnRef idx="2">
+            <a:schemeClr val="accent1"/>
+          </a:lnRef>
+          <a:fillRef idx="0">
+            <a:schemeClr val="accent1"/>
+          </a:fillRef>
+          <a:effectRef idx="1">
+            <a:schemeClr val="accent1"/>
+          </a:effectRef>
+          <a:fontRef idx="minor">
+            <a:schemeClr val="tx1"/>
+          </a:fontRef>
+        </p:style>
+      </p:cxnSp>
+      <p:cxnSp>
+        <p:nvCxnSpPr>
+          <p:cNvPr id="23" name="Straight Arrow Connector 22">
+            <a:extLst>
+              <a:ext uri="{FF2B5EF4-FFF2-40B4-BE49-F238E27FC236}">
+                <a16:creationId xmlns:a16="http://schemas.microsoft.com/office/drawing/2014/main" id="{1F1794E8-9985-D68F-0CE5-EA70E008D92F}"/>
+              </a:ext>
+            </a:extLst>
+          </p:cNvPr>
+          <p:cNvCxnSpPr>
+            <a:cxnSpLocks/>
+            <a:stCxn id="3" idx="2"/>
+            <a:endCxn id="16" idx="0"/>
+          </p:cNvCxnSpPr>
+          <p:nvPr/>
+        </p:nvCxnSpPr>
+        <p:spPr>
+          <a:xfrm flipH="1">
+            <a:off x="2470725" y="3429000"/>
+            <a:ext cx="2" cy="327891"/>
+          </a:xfrm>
+          <a:prstGeom prst="straightConnector1">
+            <a:avLst/>
+          </a:prstGeom>
+          <a:ln>
+            <a:tailEnd type="triangle"/>
+          </a:ln>
+        </p:spPr>
+        <p:style>
+          <a:lnRef idx="2">
+            <a:schemeClr val="accent1"/>
+          </a:lnRef>
+          <a:fillRef idx="0">
+            <a:schemeClr val="accent1"/>
+          </a:fillRef>
+          <a:effectRef idx="1">
+            <a:schemeClr val="accent1"/>
+          </a:effectRef>
+          <a:fontRef idx="minor">
+            <a:schemeClr val="tx1"/>
+          </a:fontRef>
+        </p:style>
+      </p:cxnSp>
+      <p:sp>
+        <p:nvSpPr>
+          <p:cNvPr id="27" name="Rectangle 26">
+            <a:extLst>
+              <a:ext uri="{FF2B5EF4-FFF2-40B4-BE49-F238E27FC236}">
+                <a16:creationId xmlns:a16="http://schemas.microsoft.com/office/drawing/2014/main" id="{74CE3786-9669-9D73-01FA-F2A010F9427E}"/>
+              </a:ext>
+            </a:extLst>
+          </p:cNvPr>
+          <p:cNvSpPr/>
+          <p:nvPr/>
+        </p:nvSpPr>
+        <p:spPr>
+          <a:xfrm>
+            <a:off x="5546433" y="734293"/>
+            <a:ext cx="1293091" cy="877455"/>
+          </a:xfrm>
+          <a:prstGeom prst="rect">
+            <a:avLst/>
+          </a:prstGeom>
+        </p:spPr>
+        <p:style>
+          <a:lnRef idx="2">
+            <a:schemeClr val="accent1">
+              <a:shade val="15000"/>
+            </a:schemeClr>
+          </a:lnRef>
+          <a:fillRef idx="1">
+            <a:schemeClr val="accent1"/>
+          </a:fillRef>
+          <a:effectRef idx="0">
+            <a:schemeClr val="accent1"/>
+          </a:effectRef>
+          <a:fontRef idx="minor">
+            <a:schemeClr val="lt1"/>
+          </a:fontRef>
+        </p:style>
+        <p:txBody>
+          <a:bodyPr rtlCol="0" anchor="ctr"/>
+          <a:lstStyle/>
+          <a:p>
+            <a:pPr algn="ctr"/>
+            <a:r>
+              <a:rPr lang="en-US" dirty="0"/>
+              <a:t>Read line from data file</a:t>
+            </a:r>
+          </a:p>
+        </p:txBody>
+      </p:sp>
+      <p:cxnSp>
+        <p:nvCxnSpPr>
+          <p:cNvPr id="28" name="Straight Arrow Connector 27">
+            <a:extLst>
+              <a:ext uri="{FF2B5EF4-FFF2-40B4-BE49-F238E27FC236}">
+                <a16:creationId xmlns:a16="http://schemas.microsoft.com/office/drawing/2014/main" id="{C27B7AF1-4CE2-7E9C-F6C2-FA07B05F6762}"/>
+              </a:ext>
+            </a:extLst>
+          </p:cNvPr>
+          <p:cNvCxnSpPr>
+            <a:cxnSpLocks/>
+            <a:endCxn id="27" idx="1"/>
+          </p:cNvCxnSpPr>
+          <p:nvPr/>
+        </p:nvCxnSpPr>
+        <p:spPr>
+          <a:xfrm>
+            <a:off x="4285677" y="1173020"/>
+            <a:ext cx="1260756" cy="1"/>
+          </a:xfrm>
+          <a:prstGeom prst="straightConnector1">
+            <a:avLst/>
+          </a:prstGeom>
+          <a:ln>
+            <a:tailEnd type="triangle"/>
+          </a:ln>
+        </p:spPr>
+        <p:style>
+          <a:lnRef idx="2">
+            <a:schemeClr val="accent1"/>
+          </a:lnRef>
+          <a:fillRef idx="0">
+            <a:schemeClr val="accent1"/>
+          </a:fillRef>
+          <a:effectRef idx="1">
+            <a:schemeClr val="accent1"/>
+          </a:effectRef>
+          <a:fontRef idx="minor">
+            <a:schemeClr val="tx1"/>
+          </a:fontRef>
+        </p:style>
+      </p:cxnSp>
+      <p:sp>
+        <p:nvSpPr>
+          <p:cNvPr id="32" name="TextBox 31">
+            <a:extLst>
+              <a:ext uri="{FF2B5EF4-FFF2-40B4-BE49-F238E27FC236}">
+                <a16:creationId xmlns:a16="http://schemas.microsoft.com/office/drawing/2014/main" id="{2CC1F77B-49DE-71E0-8ED7-FAF5BD99EF38}"/>
+              </a:ext>
+            </a:extLst>
+          </p:cNvPr>
+          <p:cNvSpPr txBox="1"/>
+          <p:nvPr/>
+        </p:nvSpPr>
+        <p:spPr>
+          <a:xfrm>
+            <a:off x="4411222" y="2339232"/>
+            <a:ext cx="474810" cy="369332"/>
+          </a:xfrm>
+          <a:prstGeom prst="rect">
+            <a:avLst/>
+          </a:prstGeom>
+          <a:noFill/>
+        </p:spPr>
+        <p:txBody>
+          <a:bodyPr wrap="none" rtlCol="0">
+            <a:spAutoFit/>
+          </a:bodyPr>
+          <a:lstStyle/>
+          <a:p>
+            <a:r>
+              <a:rPr lang="en-US" dirty="0"/>
+              <a:t>No</a:t>
+            </a:r>
+          </a:p>
+        </p:txBody>
+      </p:sp>
+      <p:cxnSp>
+        <p:nvCxnSpPr>
+          <p:cNvPr id="33" name="Connector: Elbow 32">
+            <a:extLst>
+              <a:ext uri="{FF2B5EF4-FFF2-40B4-BE49-F238E27FC236}">
+                <a16:creationId xmlns:a16="http://schemas.microsoft.com/office/drawing/2014/main" id="{B48E02EC-DB90-FB78-0708-5C11BC2F0791}"/>
+              </a:ext>
+            </a:extLst>
+          </p:cNvPr>
+          <p:cNvCxnSpPr>
+            <a:cxnSpLocks/>
+            <a:stCxn id="16" idx="2"/>
+          </p:cNvCxnSpPr>
+          <p:nvPr/>
+        </p:nvCxnSpPr>
+        <p:spPr>
+          <a:xfrm rot="5400000" flipH="1" flipV="1">
+            <a:off x="1535540" y="3078020"/>
+            <a:ext cx="3408219" cy="1537851"/>
+          </a:xfrm>
+          <a:prstGeom prst="bentConnector3">
+            <a:avLst>
+              <a:gd name="adj1" fmla="val -6707"/>
+            </a:avLst>
+          </a:prstGeom>
+        </p:spPr>
+        <p:style>
+          <a:lnRef idx="2">
+            <a:schemeClr val="accent1"/>
+          </a:lnRef>
+          <a:fillRef idx="0">
+            <a:schemeClr val="accent1"/>
+          </a:fillRef>
+          <a:effectRef idx="1">
+            <a:schemeClr val="accent1"/>
+          </a:effectRef>
+          <a:fontRef idx="minor">
+            <a:schemeClr val="tx1"/>
+          </a:fontRef>
+        </p:style>
+      </p:cxnSp>
+      <p:cxnSp>
+        <p:nvCxnSpPr>
+          <p:cNvPr id="37" name="Connector: Elbow 36">
+            <a:extLst>
+              <a:ext uri="{FF2B5EF4-FFF2-40B4-BE49-F238E27FC236}">
+                <a16:creationId xmlns:a16="http://schemas.microsoft.com/office/drawing/2014/main" id="{93763FE7-B93D-B236-7093-D16130E85C8B}"/>
+              </a:ext>
+            </a:extLst>
+          </p:cNvPr>
+          <p:cNvCxnSpPr>
+            <a:cxnSpLocks/>
+            <a:endCxn id="27" idx="0"/>
+          </p:cNvCxnSpPr>
+          <p:nvPr/>
+        </p:nvCxnSpPr>
+        <p:spPr>
+          <a:xfrm flipV="1">
+            <a:off x="3994724" y="734293"/>
+            <a:ext cx="2198255" cy="1408543"/>
+          </a:xfrm>
+          <a:prstGeom prst="bentConnector4">
+            <a:avLst>
+              <a:gd name="adj1" fmla="val 840"/>
+              <a:gd name="adj2" fmla="val 116230"/>
+            </a:avLst>
+          </a:prstGeom>
+          <a:ln>
+            <a:tailEnd type="triangle"/>
+          </a:ln>
+        </p:spPr>
+        <p:style>
+          <a:lnRef idx="2">
+            <a:schemeClr val="accent1"/>
+          </a:lnRef>
+          <a:fillRef idx="0">
+            <a:schemeClr val="accent1"/>
+          </a:fillRef>
+          <a:effectRef idx="1">
+            <a:schemeClr val="accent1"/>
+          </a:effectRef>
+          <a:fontRef idx="minor">
+            <a:schemeClr val="tx1"/>
+          </a:fontRef>
+        </p:style>
+      </p:cxnSp>
+      <p:cxnSp>
+        <p:nvCxnSpPr>
+          <p:cNvPr id="41" name="Straight Arrow Connector 40">
+            <a:extLst>
+              <a:ext uri="{FF2B5EF4-FFF2-40B4-BE49-F238E27FC236}">
+                <a16:creationId xmlns:a16="http://schemas.microsoft.com/office/drawing/2014/main" id="{1C5DC5E5-327C-A673-7FE3-BDC79C171403}"/>
+              </a:ext>
+            </a:extLst>
+          </p:cNvPr>
+          <p:cNvCxnSpPr>
+            <a:cxnSpLocks/>
+            <a:stCxn id="27" idx="2"/>
+            <a:endCxn id="18" idx="0"/>
+          </p:cNvCxnSpPr>
+          <p:nvPr/>
+        </p:nvCxnSpPr>
+        <p:spPr>
+          <a:xfrm>
+            <a:off x="6192979" y="1611748"/>
+            <a:ext cx="0" cy="376379"/>
+          </a:xfrm>
+          <a:prstGeom prst="straightConnector1">
+            <a:avLst/>
+          </a:prstGeom>
+          <a:ln>
+            <a:tailEnd type="triangle"/>
+          </a:ln>
+        </p:spPr>
+        <p:style>
+          <a:lnRef idx="2">
+            <a:schemeClr val="accent1"/>
+          </a:lnRef>
+          <a:fillRef idx="0">
+            <a:schemeClr val="accent1"/>
+          </a:fillRef>
+          <a:effectRef idx="1">
+            <a:schemeClr val="accent1"/>
+          </a:effectRef>
+          <a:fontRef idx="minor">
+            <a:schemeClr val="tx1"/>
+          </a:fontRef>
+        </p:style>
+      </p:cxnSp>
+      <p:sp>
+        <p:nvSpPr>
+          <p:cNvPr id="48" name="Rectangle 47">
+            <a:extLst>
+              <a:ext uri="{FF2B5EF4-FFF2-40B4-BE49-F238E27FC236}">
+                <a16:creationId xmlns:a16="http://schemas.microsoft.com/office/drawing/2014/main" id="{8D951054-4167-30DA-3CA7-E2DAD5B53A69}"/>
+              </a:ext>
+            </a:extLst>
+          </p:cNvPr>
+          <p:cNvSpPr/>
+          <p:nvPr/>
+        </p:nvSpPr>
+        <p:spPr>
+          <a:xfrm>
+            <a:off x="5082304" y="3919669"/>
+            <a:ext cx="2221347" cy="1186872"/>
+          </a:xfrm>
+          <a:prstGeom prst="rect">
+            <a:avLst/>
+          </a:prstGeom>
+        </p:spPr>
+        <p:style>
+          <a:lnRef idx="2">
+            <a:schemeClr val="accent1">
+              <a:shade val="15000"/>
+            </a:schemeClr>
+          </a:lnRef>
+          <a:fillRef idx="1">
+            <a:schemeClr val="accent1"/>
+          </a:fillRef>
+          <a:effectRef idx="0">
+            <a:schemeClr val="accent1"/>
+          </a:effectRef>
+          <a:fontRef idx="minor">
+            <a:schemeClr val="lt1"/>
+          </a:fontRef>
+        </p:style>
+        <p:txBody>
+          <a:bodyPr rtlCol="0" anchor="ctr"/>
+          <a:lstStyle/>
+          <a:p>
+            <a:pPr marL="285750" indent="-285750" algn="ctr">
+              <a:buFont typeface="Arial" panose="020B0604020202020204" pitchFamily="34" charset="0"/>
+              <a:buChar char="•"/>
+            </a:pPr>
+            <a:r>
+              <a:rPr lang="en-US" dirty="0"/>
+              <a:t>Calculate pump down time</a:t>
+            </a:r>
+          </a:p>
+          <a:p>
+            <a:pPr marL="285750" indent="-285750" algn="ctr">
+              <a:buFont typeface="Arial" panose="020B0604020202020204" pitchFamily="34" charset="0"/>
+              <a:buChar char="•"/>
+            </a:pPr>
+            <a:r>
+              <a:rPr lang="en-US" dirty="0"/>
+              <a:t>Update IDL</a:t>
+            </a:r>
+          </a:p>
+          <a:p>
+            <a:pPr marL="285750" indent="-285750" algn="ctr">
+              <a:buFont typeface="Arial" panose="020B0604020202020204" pitchFamily="34" charset="0"/>
+              <a:buChar char="•"/>
+            </a:pPr>
+            <a:r>
+              <a:rPr lang="en-US" dirty="0"/>
+              <a:t>Write out IDL</a:t>
+            </a:r>
+          </a:p>
+        </p:txBody>
+      </p:sp>
+      <p:cxnSp>
+        <p:nvCxnSpPr>
+          <p:cNvPr id="52" name="Straight Arrow Connector 51">
+            <a:extLst>
+              <a:ext uri="{FF2B5EF4-FFF2-40B4-BE49-F238E27FC236}">
+                <a16:creationId xmlns:a16="http://schemas.microsoft.com/office/drawing/2014/main" id="{BCAA390B-07F0-D027-6377-D0DC19889F4A}"/>
+              </a:ext>
+            </a:extLst>
+          </p:cNvPr>
+          <p:cNvCxnSpPr>
+            <a:stCxn id="18" idx="2"/>
+            <a:endCxn id="48" idx="0"/>
+          </p:cNvCxnSpPr>
+          <p:nvPr/>
+        </p:nvCxnSpPr>
+        <p:spPr>
+          <a:xfrm flipH="1">
+            <a:off x="6192978" y="3543290"/>
+            <a:ext cx="1" cy="376379"/>
+          </a:xfrm>
+          <a:prstGeom prst="straightConnector1">
+            <a:avLst/>
+          </a:prstGeom>
+          <a:ln>
+            <a:tailEnd type="triangle"/>
+          </a:ln>
+        </p:spPr>
+        <p:style>
+          <a:lnRef idx="2">
+            <a:schemeClr val="accent1"/>
+          </a:lnRef>
+          <a:fillRef idx="0">
+            <a:schemeClr val="accent1"/>
+          </a:fillRef>
+          <a:effectRef idx="1">
+            <a:schemeClr val="accent1"/>
+          </a:effectRef>
+          <a:fontRef idx="minor">
+            <a:schemeClr val="tx1"/>
+          </a:fontRef>
+        </p:style>
+      </p:cxnSp>
+      <p:sp>
+        <p:nvSpPr>
+          <p:cNvPr id="53" name="Flowchart: Decision 52">
+            <a:extLst>
+              <a:ext uri="{FF2B5EF4-FFF2-40B4-BE49-F238E27FC236}">
+                <a16:creationId xmlns:a16="http://schemas.microsoft.com/office/drawing/2014/main" id="{E43183A0-493A-04D5-4591-20A0F3CC7E20}"/>
+              </a:ext>
+            </a:extLst>
+          </p:cNvPr>
+          <p:cNvSpPr/>
+          <p:nvPr/>
+        </p:nvSpPr>
+        <p:spPr>
+          <a:xfrm>
+            <a:off x="8557487" y="1983513"/>
+            <a:ext cx="2613891" cy="1555163"/>
+          </a:xfrm>
+          <a:prstGeom prst="flowChartDecision">
+            <a:avLst/>
+          </a:prstGeom>
+        </p:spPr>
+        <p:style>
+          <a:lnRef idx="2">
+            <a:schemeClr val="accent1">
+              <a:shade val="15000"/>
+            </a:schemeClr>
+          </a:lnRef>
+          <a:fillRef idx="1">
+            <a:schemeClr val="accent1"/>
+          </a:fillRef>
+          <a:effectRef idx="0">
+            <a:schemeClr val="accent1"/>
+          </a:effectRef>
+          <a:fontRef idx="minor">
+            <a:schemeClr val="lt1"/>
+          </a:fontRef>
+        </p:style>
+        <p:txBody>
+          <a:bodyPr rtlCol="0" anchor="ctr"/>
+          <a:lstStyle/>
+          <a:p>
+            <a:pPr algn="ctr"/>
+            <a:r>
+              <a:rPr lang="en-US" dirty="0"/>
+              <a:t>Implant Start?</a:t>
+            </a:r>
+          </a:p>
+          <a:p>
+            <a:pPr algn="ctr"/>
+            <a:r>
+              <a:rPr lang="en-US" dirty="0"/>
+              <a:t>State = 1</a:t>
+            </a:r>
+          </a:p>
+        </p:txBody>
+      </p:sp>
+      <p:cxnSp>
+        <p:nvCxnSpPr>
+          <p:cNvPr id="54" name="Connector: Elbow 53">
+            <a:extLst>
+              <a:ext uri="{FF2B5EF4-FFF2-40B4-BE49-F238E27FC236}">
+                <a16:creationId xmlns:a16="http://schemas.microsoft.com/office/drawing/2014/main" id="{B7B7F931-38C4-6355-CDE4-73A9D9E36BBB}"/>
+              </a:ext>
+            </a:extLst>
+          </p:cNvPr>
+          <p:cNvCxnSpPr>
+            <a:cxnSpLocks/>
+            <a:stCxn id="53" idx="1"/>
+          </p:cNvCxnSpPr>
+          <p:nvPr/>
+        </p:nvCxnSpPr>
+        <p:spPr>
+          <a:xfrm rot="10800000">
+            <a:off x="7957135" y="1145317"/>
+            <a:ext cx="600353" cy="1615779"/>
+          </a:xfrm>
+          <a:prstGeom prst="bentConnector2">
+            <a:avLst/>
+          </a:prstGeom>
+        </p:spPr>
+        <p:style>
+          <a:lnRef idx="2">
+            <a:schemeClr val="accent1"/>
+          </a:lnRef>
+          <a:fillRef idx="0">
+            <a:schemeClr val="accent1"/>
+          </a:fillRef>
+          <a:effectRef idx="1">
+            <a:schemeClr val="accent1"/>
+          </a:effectRef>
+          <a:fontRef idx="minor">
+            <a:schemeClr val="tx1"/>
+          </a:fontRef>
+        </p:style>
+      </p:cxnSp>
+      <p:sp>
+        <p:nvSpPr>
+          <p:cNvPr id="55" name="Rectangle 54">
+            <a:extLst>
+              <a:ext uri="{FF2B5EF4-FFF2-40B4-BE49-F238E27FC236}">
+                <a16:creationId xmlns:a16="http://schemas.microsoft.com/office/drawing/2014/main" id="{4DA6C0F1-BB52-1676-2827-4BD76B97095A}"/>
+              </a:ext>
+            </a:extLst>
+          </p:cNvPr>
+          <p:cNvSpPr/>
+          <p:nvPr/>
+        </p:nvSpPr>
+        <p:spPr>
+          <a:xfrm>
+            <a:off x="9217887" y="729679"/>
+            <a:ext cx="1293091" cy="877455"/>
+          </a:xfrm>
+          <a:prstGeom prst="rect">
+            <a:avLst/>
+          </a:prstGeom>
+        </p:spPr>
+        <p:style>
+          <a:lnRef idx="2">
+            <a:schemeClr val="accent1">
+              <a:shade val="15000"/>
+            </a:schemeClr>
+          </a:lnRef>
+          <a:fillRef idx="1">
+            <a:schemeClr val="accent1"/>
+          </a:fillRef>
+          <a:effectRef idx="0">
+            <a:schemeClr val="accent1"/>
+          </a:effectRef>
+          <a:fontRef idx="minor">
+            <a:schemeClr val="lt1"/>
+          </a:fontRef>
+        </p:style>
+        <p:txBody>
+          <a:bodyPr rtlCol="0" anchor="ctr"/>
+          <a:lstStyle/>
+          <a:p>
+            <a:pPr algn="ctr"/>
+            <a:r>
+              <a:rPr lang="en-US" dirty="0"/>
+              <a:t>Read line from data file</a:t>
+            </a:r>
+          </a:p>
+        </p:txBody>
+      </p:sp>
+      <p:cxnSp>
+        <p:nvCxnSpPr>
+          <p:cNvPr id="56" name="Straight Arrow Connector 55">
+            <a:extLst>
+              <a:ext uri="{FF2B5EF4-FFF2-40B4-BE49-F238E27FC236}">
+                <a16:creationId xmlns:a16="http://schemas.microsoft.com/office/drawing/2014/main" id="{933FB6DB-6199-946E-BC17-E69C9A1B1FBE}"/>
+              </a:ext>
+            </a:extLst>
+          </p:cNvPr>
+          <p:cNvCxnSpPr>
+            <a:cxnSpLocks/>
+            <a:endCxn id="55" idx="1"/>
+          </p:cNvCxnSpPr>
+          <p:nvPr/>
+        </p:nvCxnSpPr>
+        <p:spPr>
+          <a:xfrm>
+            <a:off x="7957131" y="1168406"/>
+            <a:ext cx="1260756" cy="1"/>
+          </a:xfrm>
+          <a:prstGeom prst="straightConnector1">
+            <a:avLst/>
+          </a:prstGeom>
+          <a:ln>
+            <a:tailEnd type="triangle"/>
+          </a:ln>
+        </p:spPr>
+        <p:style>
+          <a:lnRef idx="2">
+            <a:schemeClr val="accent1"/>
+          </a:lnRef>
+          <a:fillRef idx="0">
+            <a:schemeClr val="accent1"/>
+          </a:fillRef>
+          <a:effectRef idx="1">
+            <a:schemeClr val="accent1"/>
+          </a:effectRef>
+          <a:fontRef idx="minor">
+            <a:schemeClr val="tx1"/>
+          </a:fontRef>
+        </p:style>
+      </p:cxnSp>
+      <p:sp>
+        <p:nvSpPr>
+          <p:cNvPr id="57" name="TextBox 56">
+            <a:extLst>
+              <a:ext uri="{FF2B5EF4-FFF2-40B4-BE49-F238E27FC236}">
+                <a16:creationId xmlns:a16="http://schemas.microsoft.com/office/drawing/2014/main" id="{6E424411-DCDC-EF3D-5EDF-CF19EED5F260}"/>
+              </a:ext>
+            </a:extLst>
+          </p:cNvPr>
+          <p:cNvSpPr txBox="1"/>
+          <p:nvPr/>
+        </p:nvSpPr>
+        <p:spPr>
+          <a:xfrm>
+            <a:off x="8082676" y="2334618"/>
+            <a:ext cx="474810" cy="369332"/>
+          </a:xfrm>
+          <a:prstGeom prst="rect">
+            <a:avLst/>
+          </a:prstGeom>
+          <a:noFill/>
+        </p:spPr>
+        <p:txBody>
+          <a:bodyPr wrap="none" rtlCol="0">
+            <a:spAutoFit/>
+          </a:bodyPr>
+          <a:lstStyle/>
+          <a:p>
+            <a:r>
+              <a:rPr lang="en-US" dirty="0"/>
+              <a:t>No</a:t>
+            </a:r>
+          </a:p>
+        </p:txBody>
+      </p:sp>
+      <p:cxnSp>
+        <p:nvCxnSpPr>
+          <p:cNvPr id="58" name="Straight Arrow Connector 57">
+            <a:extLst>
+              <a:ext uri="{FF2B5EF4-FFF2-40B4-BE49-F238E27FC236}">
+                <a16:creationId xmlns:a16="http://schemas.microsoft.com/office/drawing/2014/main" id="{D393163E-D43C-06E5-9DFC-905A564BC47B}"/>
+              </a:ext>
+            </a:extLst>
+          </p:cNvPr>
+          <p:cNvCxnSpPr>
+            <a:cxnSpLocks/>
+            <a:stCxn id="55" idx="2"/>
+            <a:endCxn id="53" idx="0"/>
+          </p:cNvCxnSpPr>
+          <p:nvPr/>
+        </p:nvCxnSpPr>
+        <p:spPr>
+          <a:xfrm>
+            <a:off x="9864433" y="1607134"/>
+            <a:ext cx="0" cy="376379"/>
+          </a:xfrm>
+          <a:prstGeom prst="straightConnector1">
+            <a:avLst/>
+          </a:prstGeom>
+          <a:ln>
+            <a:tailEnd type="triangle"/>
+          </a:ln>
+        </p:spPr>
+        <p:style>
+          <a:lnRef idx="2">
+            <a:schemeClr val="accent1"/>
+          </a:lnRef>
+          <a:fillRef idx="0">
+            <a:schemeClr val="accent1"/>
+          </a:fillRef>
+          <a:effectRef idx="1">
+            <a:schemeClr val="accent1"/>
+          </a:effectRef>
+          <a:fontRef idx="minor">
+            <a:schemeClr val="tx1"/>
+          </a:fontRef>
+        </p:style>
+      </p:cxnSp>
+      <p:sp>
+        <p:nvSpPr>
+          <p:cNvPr id="59" name="Rectangle 58">
+            <a:extLst>
+              <a:ext uri="{FF2B5EF4-FFF2-40B4-BE49-F238E27FC236}">
+                <a16:creationId xmlns:a16="http://schemas.microsoft.com/office/drawing/2014/main" id="{EDC062B2-2B97-16D4-A2F4-1269F7E1D7DF}"/>
+              </a:ext>
+            </a:extLst>
+          </p:cNvPr>
+          <p:cNvSpPr/>
+          <p:nvPr/>
+        </p:nvSpPr>
+        <p:spPr>
+          <a:xfrm>
+            <a:off x="8753758" y="3915055"/>
+            <a:ext cx="2221347" cy="1186872"/>
+          </a:xfrm>
+          <a:prstGeom prst="rect">
+            <a:avLst/>
+          </a:prstGeom>
+        </p:spPr>
+        <p:style>
+          <a:lnRef idx="2">
+            <a:schemeClr val="accent1">
+              <a:shade val="15000"/>
+            </a:schemeClr>
+          </a:lnRef>
+          <a:fillRef idx="1">
+            <a:schemeClr val="accent1"/>
+          </a:fillRef>
+          <a:effectRef idx="0">
+            <a:schemeClr val="accent1"/>
+          </a:effectRef>
+          <a:fontRef idx="minor">
+            <a:schemeClr val="lt1"/>
+          </a:fontRef>
+        </p:style>
+        <p:txBody>
+          <a:bodyPr rtlCol="0" anchor="ctr"/>
+          <a:lstStyle/>
+          <a:p>
+            <a:pPr marL="285750" indent="-285750" algn="ctr">
+              <a:buFont typeface="Arial" panose="020B0604020202020204" pitchFamily="34" charset="0"/>
+              <a:buChar char="•"/>
+            </a:pPr>
+            <a:r>
+              <a:rPr lang="en-US" dirty="0"/>
+              <a:t>Update IDL parameters</a:t>
+            </a:r>
+          </a:p>
+          <a:p>
+            <a:pPr marL="285750" indent="-285750" algn="ctr">
+              <a:buFont typeface="Arial" panose="020B0604020202020204" pitchFamily="34" charset="0"/>
+              <a:buChar char="•"/>
+            </a:pPr>
+            <a:r>
+              <a:rPr lang="en-US" dirty="0"/>
+              <a:t>Write out IDL</a:t>
+            </a:r>
+          </a:p>
+        </p:txBody>
+      </p:sp>
+      <p:cxnSp>
+        <p:nvCxnSpPr>
+          <p:cNvPr id="60" name="Straight Arrow Connector 59">
+            <a:extLst>
+              <a:ext uri="{FF2B5EF4-FFF2-40B4-BE49-F238E27FC236}">
+                <a16:creationId xmlns:a16="http://schemas.microsoft.com/office/drawing/2014/main" id="{3EB4EDBC-367F-3938-A401-27DFBD1CA4AB}"/>
+              </a:ext>
+            </a:extLst>
+          </p:cNvPr>
+          <p:cNvCxnSpPr>
+            <a:stCxn id="53" idx="2"/>
+            <a:endCxn id="59" idx="0"/>
+          </p:cNvCxnSpPr>
+          <p:nvPr/>
+        </p:nvCxnSpPr>
+        <p:spPr>
+          <a:xfrm flipH="1">
+            <a:off x="9864432" y="3538676"/>
+            <a:ext cx="1" cy="376379"/>
+          </a:xfrm>
+          <a:prstGeom prst="straightConnector1">
+            <a:avLst/>
+          </a:prstGeom>
+          <a:ln>
+            <a:tailEnd type="triangle"/>
+          </a:ln>
+        </p:spPr>
+        <p:style>
+          <a:lnRef idx="2">
+            <a:schemeClr val="accent1"/>
+          </a:lnRef>
+          <a:fillRef idx="0">
+            <a:schemeClr val="accent1"/>
+          </a:fillRef>
+          <a:effectRef idx="1">
+            <a:schemeClr val="accent1"/>
+          </a:effectRef>
+          <a:fontRef idx="minor">
+            <a:schemeClr val="tx1"/>
+          </a:fontRef>
+        </p:style>
+      </p:cxnSp>
+      <p:cxnSp>
+        <p:nvCxnSpPr>
+          <p:cNvPr id="61" name="Connector: Elbow 60">
+            <a:extLst>
+              <a:ext uri="{FF2B5EF4-FFF2-40B4-BE49-F238E27FC236}">
+                <a16:creationId xmlns:a16="http://schemas.microsoft.com/office/drawing/2014/main" id="{ECD57E87-A883-88A9-C010-5248B515C36B}"/>
+              </a:ext>
+            </a:extLst>
+          </p:cNvPr>
+          <p:cNvCxnSpPr>
+            <a:cxnSpLocks/>
+            <a:stCxn id="48" idx="2"/>
+          </p:cNvCxnSpPr>
+          <p:nvPr/>
+        </p:nvCxnSpPr>
+        <p:spPr>
+          <a:xfrm rot="5400000" flipH="1" flipV="1">
+            <a:off x="5969583" y="3345285"/>
+            <a:ext cx="1984650" cy="1537861"/>
+          </a:xfrm>
+          <a:prstGeom prst="bentConnector3">
+            <a:avLst>
+              <a:gd name="adj1" fmla="val -31530"/>
+            </a:avLst>
+          </a:prstGeom>
+        </p:spPr>
+        <p:style>
+          <a:lnRef idx="2">
+            <a:schemeClr val="accent1"/>
+          </a:lnRef>
+          <a:fillRef idx="0">
+            <a:schemeClr val="accent1"/>
+          </a:fillRef>
+          <a:effectRef idx="1">
+            <a:schemeClr val="accent1"/>
+          </a:effectRef>
+          <a:fontRef idx="minor">
+            <a:schemeClr val="tx1"/>
+          </a:fontRef>
+        </p:style>
+      </p:cxnSp>
+      <p:cxnSp>
+        <p:nvCxnSpPr>
+          <p:cNvPr id="62" name="Connector: Elbow 61">
+            <a:extLst>
+              <a:ext uri="{FF2B5EF4-FFF2-40B4-BE49-F238E27FC236}">
+                <a16:creationId xmlns:a16="http://schemas.microsoft.com/office/drawing/2014/main" id="{4FB521C8-1645-22D2-0805-714F8C70F80B}"/>
+              </a:ext>
+            </a:extLst>
+          </p:cNvPr>
+          <p:cNvCxnSpPr>
+            <a:cxnSpLocks/>
+            <a:endCxn id="55" idx="0"/>
+          </p:cNvCxnSpPr>
+          <p:nvPr/>
+        </p:nvCxnSpPr>
+        <p:spPr>
+          <a:xfrm rot="5400000" flipH="1" flipV="1">
+            <a:off x="7608454" y="865912"/>
+            <a:ext cx="2392212" cy="2119746"/>
+          </a:xfrm>
+          <a:prstGeom prst="bentConnector3">
+            <a:avLst>
+              <a:gd name="adj1" fmla="val 109556"/>
+            </a:avLst>
+          </a:prstGeom>
+          <a:ln>
+            <a:tailEnd type="triangle"/>
+          </a:ln>
+        </p:spPr>
+        <p:style>
+          <a:lnRef idx="2">
+            <a:schemeClr val="accent1"/>
+          </a:lnRef>
+          <a:fillRef idx="0">
+            <a:schemeClr val="accent1"/>
+          </a:fillRef>
+          <a:effectRef idx="1">
+            <a:schemeClr val="accent1"/>
+          </a:effectRef>
+          <a:fontRef idx="minor">
+            <a:schemeClr val="tx1"/>
+          </a:fontRef>
+        </p:style>
+      </p:cxnSp>
+      <p:sp>
+        <p:nvSpPr>
+          <p:cNvPr id="77" name="Flowchart: Decision 76">
+            <a:extLst>
+              <a:ext uri="{FF2B5EF4-FFF2-40B4-BE49-F238E27FC236}">
+                <a16:creationId xmlns:a16="http://schemas.microsoft.com/office/drawing/2014/main" id="{D238BFC7-C87A-59D4-A7F7-61100FFE6EDB}"/>
+              </a:ext>
+            </a:extLst>
+          </p:cNvPr>
+          <p:cNvSpPr/>
+          <p:nvPr/>
+        </p:nvSpPr>
+        <p:spPr>
+          <a:xfrm>
+            <a:off x="8610604" y="5250866"/>
+            <a:ext cx="2613891" cy="1555163"/>
+          </a:xfrm>
+          <a:prstGeom prst="flowChartDecision">
+            <a:avLst/>
+          </a:prstGeom>
+        </p:spPr>
+        <p:style>
+          <a:lnRef idx="2">
+            <a:schemeClr val="accent1">
+              <a:shade val="15000"/>
+            </a:schemeClr>
+          </a:lnRef>
+          <a:fillRef idx="1">
+            <a:schemeClr val="accent1"/>
+          </a:fillRef>
+          <a:effectRef idx="0">
+            <a:schemeClr val="accent1"/>
+          </a:effectRef>
+          <a:fontRef idx="minor">
+            <a:schemeClr val="lt1"/>
+          </a:fontRef>
+        </p:style>
+        <p:txBody>
+          <a:bodyPr rtlCol="0" anchor="ctr"/>
+          <a:lstStyle/>
+          <a:p>
+            <a:pPr algn="ctr"/>
+            <a:r>
+              <a:rPr lang="en-US" dirty="0"/>
+              <a:t>Interrupt? </a:t>
+            </a:r>
+            <a:r>
+              <a:rPr lang="en-US"/>
+              <a:t>State = 6</a:t>
+            </a:r>
+            <a:endParaRPr lang="en-US" dirty="0"/>
+          </a:p>
+        </p:txBody>
+      </p:sp>
+    </p:spTree>
+    <p:extLst>
+      <p:ext uri="{BB962C8B-B14F-4D97-AF65-F5344CB8AC3E}">
+        <p14:creationId xmlns:p14="http://schemas.microsoft.com/office/powerpoint/2010/main" val="1896515347"/>
       </p:ext>
     </p:extLst>
   </p:cSld>
